--- a/chatgpt/kpmg-slidegen/outputs/smoke-lorem/deck.pptx
+++ b/chatgpt/kpmg-slidegen/outputs/smoke-lorem/deck.pptx
@@ -6419,7 +6419,92 @@
                 <a:ea typeface="Arial" pitchFamily="34" charset="-122"/>
                 <a:cs typeface="Arial" pitchFamily="34" charset="-120"/>
               </a:rPr>
-              <a:t>Atlas Holdco Quality of Earnings Diligence Report</a:t>
+              <a:t>Atlas</a:t>
+            </a:r>
+            <a:endParaRPr lang="en-US" sz="4000" dirty="0"/>
+          </a:p>
+          <a:p>
+            <a:pPr algn="l" indent="0" marL="0">
+              <a:buNone/>
+            </a:pPr>
+            <a:r>
+              <a:rPr lang="en-US" sz="4000" b="1" dirty="0">
+                <a:solidFill>
+                  <a:srgbClr val="FFFFFF"/>
+                </a:solidFill>
+                <a:latin typeface="Arial" pitchFamily="34" charset="0"/>
+                <a:ea typeface="Arial" pitchFamily="34" charset="-122"/>
+                <a:cs typeface="Arial" pitchFamily="34" charset="-120"/>
+              </a:rPr>
+              <a:t>Holdco</a:t>
+            </a:r>
+            <a:endParaRPr lang="en-US" sz="4000" dirty="0"/>
+          </a:p>
+          <a:p>
+            <a:pPr algn="l" indent="0" marL="0">
+              <a:buNone/>
+            </a:pPr>
+            <a:r>
+              <a:rPr lang="en-US" sz="4000" b="1" dirty="0">
+                <a:solidFill>
+                  <a:srgbClr val="FFFFFF"/>
+                </a:solidFill>
+                <a:latin typeface="Arial" pitchFamily="34" charset="0"/>
+                <a:ea typeface="Arial" pitchFamily="34" charset="-122"/>
+                <a:cs typeface="Arial" pitchFamily="34" charset="-120"/>
+              </a:rPr>
+              <a:t>Quality of</a:t>
+            </a:r>
+            <a:endParaRPr lang="en-US" sz="4000" dirty="0"/>
+          </a:p>
+          <a:p>
+            <a:pPr algn="l" indent="0" marL="0">
+              <a:buNone/>
+            </a:pPr>
+            <a:r>
+              <a:rPr lang="en-US" sz="4000" b="1" dirty="0">
+                <a:solidFill>
+                  <a:srgbClr val="FFFFFF"/>
+                </a:solidFill>
+                <a:latin typeface="Arial" pitchFamily="34" charset="0"/>
+                <a:ea typeface="Arial" pitchFamily="34" charset="-122"/>
+                <a:cs typeface="Arial" pitchFamily="34" charset="-120"/>
+              </a:rPr>
+              <a:t>Earnings</a:t>
+            </a:r>
+            <a:endParaRPr lang="en-US" sz="4000" dirty="0"/>
+          </a:p>
+          <a:p>
+            <a:pPr algn="l" indent="0" marL="0">
+              <a:buNone/>
+            </a:pPr>
+            <a:r>
+              <a:rPr lang="en-US" sz="4000" b="1" dirty="0">
+                <a:solidFill>
+                  <a:srgbClr val="FFFFFF"/>
+                </a:solidFill>
+                <a:latin typeface="Arial" pitchFamily="34" charset="0"/>
+                <a:ea typeface="Arial" pitchFamily="34" charset="-122"/>
+                <a:cs typeface="Arial" pitchFamily="34" charset="-120"/>
+              </a:rPr>
+              <a:t>Diligence</a:t>
+            </a:r>
+            <a:endParaRPr lang="en-US" sz="4000" dirty="0"/>
+          </a:p>
+          <a:p>
+            <a:pPr algn="l" indent="0" marL="0">
+              <a:buNone/>
+            </a:pPr>
+            <a:r>
+              <a:rPr lang="en-US" sz="4000" b="1" dirty="0">
+                <a:solidFill>
+                  <a:srgbClr val="FFFFFF"/>
+                </a:solidFill>
+                <a:latin typeface="Arial" pitchFamily="34" charset="0"/>
+                <a:ea typeface="Arial" pitchFamily="34" charset="-122"/>
+                <a:cs typeface="Arial" pitchFamily="34" charset="-120"/>
+              </a:rPr>
+              <a:t>Report</a:t>
             </a:r>
             <a:endParaRPr lang="en-US" sz="4000" dirty="0"/>
           </a:p>
@@ -6599,7 +6684,7 @@
         <p:spPr>
           <a:xfrm>
             <a:off x="998433" y="1716786"/>
-            <a:ext cx="10204338" cy="4221328"/>
+            <a:ext cx="10204338" cy="4248760"/>
           </a:xfrm>
           <a:prstGeom prst="rect">
             <a:avLst/>
@@ -6962,7 +7047,7 @@
         <p:spPr>
           <a:xfrm>
             <a:off x="998433" y="1716786"/>
-            <a:ext cx="10204338" cy="4221328"/>
+            <a:ext cx="10204338" cy="4248760"/>
           </a:xfrm>
           <a:prstGeom prst="rect">
             <a:avLst/>
@@ -7373,8 +7458,8 @@
           </p:nvPr>
         </p:nvGraphicFramePr>
         <p:xfrm>
-          <a:off x="995361" y="3978688"/>
-          <a:ext cx="5036400" cy="2197170"/>
+          <a:off x="995361" y="4170712"/>
+          <a:ext cx="5036400" cy="2005146"/>
         </p:xfrm>
         <a:graphic>
           <a:graphicData uri="http://schemas.openxmlformats.org/drawingml/2006/table">
@@ -9131,8 +9216,8 @@
           </p:nvPr>
         </p:nvGraphicFramePr>
         <p:xfrm>
-          <a:off x="995361" y="3978688"/>
-          <a:ext cx="5036400" cy="2197170"/>
+          <a:off x="995361" y="4170712"/>
+          <a:ext cx="5036400" cy="2005146"/>
         </p:xfrm>
         <a:graphic>
           <a:graphicData uri="http://schemas.openxmlformats.org/drawingml/2006/table">
@@ -11451,7 +11536,7 @@
         </p:nvGraphicFramePr>
         <p:xfrm>
           <a:off x="6400800" y="1716786"/>
-          <a:ext cx="4800600" cy="4184752"/>
+          <a:ext cx="4800600" cy="4230472"/>
         </p:xfrm>
         <a:graphic xmlns:a="http://schemas.openxmlformats.org/drawingml/2006/main">
           <a:graphicData uri="http://schemas.openxmlformats.org/drawingml/2006/chart">
@@ -11467,7 +11552,7 @@
         </p:nvSpPr>
         <p:spPr>
           <a:xfrm>
-            <a:off x="6400800" y="5947258"/>
+            <a:off x="6400800" y="5992978"/>
             <a:ext cx="4800600" cy="182880"/>
           </a:xfrm>
           <a:prstGeom prst="rect">
@@ -13976,7 +14061,7 @@
         </p:nvGraphicFramePr>
         <p:xfrm>
           <a:off x="6400800" y="1716786"/>
-          <a:ext cx="4800600" cy="4184752"/>
+          <a:ext cx="4800600" cy="4230472"/>
         </p:xfrm>
         <a:graphic xmlns:a="http://schemas.openxmlformats.org/drawingml/2006/main">
           <a:graphicData uri="http://schemas.openxmlformats.org/drawingml/2006/chart">
@@ -13992,7 +14077,7 @@
         </p:nvSpPr>
         <p:spPr>
           <a:xfrm>
-            <a:off x="6400800" y="5947258"/>
+            <a:off x="6400800" y="5992978"/>
             <a:ext cx="4800600" cy="182880"/>
           </a:xfrm>
           <a:prstGeom prst="rect">
@@ -14347,8 +14432,8 @@
           </p:nvPr>
         </p:nvGraphicFramePr>
         <p:xfrm>
-          <a:off x="995361" y="3978688"/>
-          <a:ext cx="5036400" cy="2197170"/>
+          <a:off x="995361" y="4170712"/>
+          <a:ext cx="5036400" cy="2005146"/>
         </p:xfrm>
         <a:graphic>
           <a:graphicData uri="http://schemas.openxmlformats.org/drawingml/2006/table">
@@ -15873,8 +15958,8 @@
           </p:nvPr>
         </p:nvGraphicFramePr>
         <p:xfrm>
-          <a:off x="995361" y="3978688"/>
-          <a:ext cx="5036400" cy="2197170"/>
+          <a:off x="995361" y="4170712"/>
+          <a:ext cx="5036400" cy="2005146"/>
         </p:xfrm>
         <a:graphic>
           <a:graphicData uri="http://schemas.openxmlformats.org/drawingml/2006/table">
@@ -18140,7 +18225,7 @@
         <p:spPr>
           <a:xfrm>
             <a:off x="998433" y="1716786"/>
-            <a:ext cx="10204338" cy="4221328"/>
+            <a:ext cx="10204338" cy="4248760"/>
           </a:xfrm>
           <a:prstGeom prst="rect">
             <a:avLst/>
@@ -20937,7 +21022,7 @@
         <p:spPr>
           <a:xfrm>
             <a:off x="998433" y="1716786"/>
-            <a:ext cx="10204338" cy="4221328"/>
+            <a:ext cx="10204338" cy="4248760"/>
           </a:xfrm>
           <a:prstGeom prst="rect">
             <a:avLst/>
@@ -21437,7 +21522,7 @@
         </p:nvGraphicFramePr>
         <p:xfrm>
           <a:off x="6400800" y="1716786"/>
-          <a:ext cx="4800600" cy="4184752"/>
+          <a:ext cx="4800600" cy="4230472"/>
         </p:xfrm>
         <a:graphic xmlns:a="http://schemas.openxmlformats.org/drawingml/2006/main">
           <a:graphicData uri="http://schemas.openxmlformats.org/drawingml/2006/chart">
@@ -21453,7 +21538,7 @@
         </p:nvSpPr>
         <p:spPr>
           <a:xfrm>
-            <a:off x="6400800" y="5947258"/>
+            <a:off x="6400800" y="5992978"/>
             <a:ext cx="4800600" cy="182880"/>
           </a:xfrm>
           <a:prstGeom prst="rect">
